--- a/public/fun/cards/teacher/teacher-31.pptx
+++ b/public/fun/cards/teacher/teacher-31.pptx
@@ -3085,7 +3085,7 @@
     <p:bg>
       <p:bgPr>
         <a:solidFill>
-          <a:srgbClr val="FBF8F2"/>
+          <a:srgbClr val="F3F4F6"/>
         </a:solidFill>
         <a:effectLst/>
       </p:bgPr>
@@ -3099,20 +3099,20 @@
       <p:grpSpPr/>
       <p:sp>
         <p:nvSpPr>
-          <p:cNvPr id="2" name="Rectangle 1"/>
+          <p:cNvPr id="2" name="Oval 1"/>
           <p:cNvSpPr/>
           <p:nvPr/>
         </p:nvSpPr>
         <p:spPr>
           <a:xfrm>
-            <a:off x="0" y="0"/>
-            <a:ext cx="165600" cy="1800000"/>
+            <a:off x="547200" y="475200"/>
+            <a:ext cx="849600" cy="849600"/>
           </a:xfrm>
-          <a:prstGeom prst="rect">
+          <a:prstGeom prst="ellipse">
             <a:avLst/>
           </a:prstGeom>
           <a:solidFill>
-            <a:srgbClr val="868D3F"/>
+            <a:srgbClr val="E8F1DA"/>
           </a:solidFill>
           <a:ln>
             <a:noFill/>
@@ -3128,20 +3128,22 @@
       </p:sp>
       <p:sp>
         <p:nvSpPr>
-          <p:cNvPr id="3" name="Rectangle 2"/>
+          <p:cNvPr id="3" name="Oval 2"/>
           <p:cNvSpPr/>
           <p:nvPr/>
         </p:nvSpPr>
         <p:spPr>
           <a:xfrm>
-            <a:off x="165600" y="0"/>
-            <a:ext cx="36000" cy="1800000"/>
+            <a:off x="187200" y="475200"/>
+            <a:ext cx="849600" cy="849600"/>
           </a:xfrm>
-          <a:prstGeom prst="rect">
+          <a:prstGeom prst="ellipse">
             <a:avLst/>
           </a:prstGeom>
           <a:solidFill>
-            <a:srgbClr val="DDDFC9"/>
+            <a:srgbClr val="A6E22E">
+              <a:alpha val="92000"/>
+            </a:srgbClr>
           </a:solidFill>
           <a:ln>
             <a:noFill/>
@@ -3157,161 +3159,14 @@
       </p:sp>
       <p:sp>
         <p:nvSpPr>
-          <p:cNvPr id="4" name="Freeform 3"/>
-          <p:cNvSpPr/>
+          <p:cNvPr id="4" name="텍스트"/>
+          <p:cNvSpPr txBox="1"/>
           <p:nvPr/>
         </p:nvSpPr>
         <p:spPr>
           <a:xfrm>
-            <a:off x="2732653" y="249887"/>
-            <a:ext cx="190680" cy="208572"/>
-          </a:xfrm>
-          <a:custGeom>
-            <a:avLst/>
-            <a:gdLst/>
-            <a:ahLst/>
-            <a:cxnLst/>
-            <a:rect l="l" t="t" r="r" b="b"/>
-            <a:pathLst>
-              <a:path w="190680" h="208572">
-                <a:moveTo>
-                  <a:pt x="137731" y="0"/>
-                </a:moveTo>
-                <a:lnTo>
-                  <a:pt x="190680" y="44430"/>
-                </a:lnTo>
-                <a:lnTo>
-                  <a:pt x="52949" y="208572"/>
-                </a:lnTo>
-                <a:lnTo>
-                  <a:pt x="0" y="164142"/>
-                </a:lnTo>
-                <a:close/>
-              </a:path>
-            </a:pathLst>
-          </a:custGeom>
-          <a:solidFill>
-            <a:srgbClr val="868D3F"/>
-          </a:solidFill>
-          <a:ln>
-            <a:noFill/>
-          </a:ln>
-        </p:spPr>
-        <p:txBody>
-          <a:bodyPr rtlCol="0" anchor="ctr"/>
-          <a:lstStyle/>
-          <a:p>
-            <a:pPr algn="ctr"/>
-          </a:p>
-        </p:txBody>
-      </p:sp>
-      <p:sp>
-        <p:nvSpPr>
-          <p:cNvPr id="5" name="Freeform 4"/>
-          <p:cNvSpPr/>
-          <p:nvPr/>
-        </p:nvSpPr>
-        <p:spPr>
-          <a:xfrm>
-            <a:off x="2710255" y="414029"/>
-            <a:ext cx="75347" cy="80459"/>
-          </a:xfrm>
-          <a:custGeom>
-            <a:avLst/>
-            <a:gdLst/>
-            <a:ahLst/>
-            <a:cxnLst/>
-            <a:rect l="l" t="t" r="r" b="b"/>
-            <a:pathLst>
-              <a:path w="75347" h="80459">
-                <a:moveTo>
-                  <a:pt x="22398" y="0"/>
-                </a:moveTo>
-                <a:lnTo>
-                  <a:pt x="75347" y="44430"/>
-                </a:lnTo>
-                <a:lnTo>
-                  <a:pt x="0" y="80459"/>
-                </a:lnTo>
-                <a:close/>
-              </a:path>
-            </a:pathLst>
-          </a:custGeom>
-          <a:solidFill>
-            <a:srgbClr val="DDDFC9"/>
-          </a:solidFill>
-          <a:ln>
-            <a:noFill/>
-          </a:ln>
-        </p:spPr>
-        <p:txBody>
-          <a:bodyPr rtlCol="0" anchor="ctr"/>
-          <a:lstStyle/>
-          <a:p>
-            <a:pPr algn="ctr"/>
-          </a:p>
-        </p:txBody>
-      </p:sp>
-      <p:sp>
-        <p:nvSpPr>
-          <p:cNvPr id="6" name="Freeform 5"/>
-          <p:cNvSpPr/>
-          <p:nvPr/>
-        </p:nvSpPr>
-        <p:spPr>
-          <a:xfrm>
-            <a:off x="2870384" y="223413"/>
-            <a:ext cx="75164" cy="70904"/>
-          </a:xfrm>
-          <a:custGeom>
-            <a:avLst/>
-            <a:gdLst/>
-            <a:ahLst/>
-            <a:cxnLst/>
-            <a:rect l="l" t="t" r="r" b="b"/>
-            <a:pathLst>
-              <a:path w="75164" h="70904">
-                <a:moveTo>
-                  <a:pt x="22215" y="0"/>
-                </a:moveTo>
-                <a:lnTo>
-                  <a:pt x="75164" y="44429"/>
-                </a:lnTo>
-                <a:lnTo>
-                  <a:pt x="52949" y="70904"/>
-                </a:lnTo>
-                <a:lnTo>
-                  <a:pt x="0" y="26474"/>
-                </a:lnTo>
-                <a:close/>
-              </a:path>
-            </a:pathLst>
-          </a:custGeom>
-          <a:solidFill>
-            <a:srgbClr val="DDDFC9"/>
-          </a:solidFill>
-          <a:ln>
-            <a:noFill/>
-          </a:ln>
-        </p:spPr>
-        <p:txBody>
-          <a:bodyPr rtlCol="0" anchor="ctr"/>
-          <a:lstStyle/>
-          <a:p>
-            <a:pPr algn="ctr"/>
-          </a:p>
-        </p:txBody>
-      </p:sp>
-      <p:sp>
-        <p:nvSpPr>
-          <p:cNvPr id="7" name="텍스트"/>
-          <p:cNvSpPr txBox="1"/>
-          <p:nvPr/>
-        </p:nvSpPr>
-        <p:spPr>
-          <a:xfrm>
-            <a:off x="396000" y="223200"/>
-            <a:ext cx="2016000" cy="108000"/>
+            <a:off x="1692000" y="223200"/>
+            <a:ext cx="1296000" cy="133351"/>
           </a:xfrm>
           <a:prstGeom prst="rect">
             <a:avLst/>
@@ -3326,13 +3181,13 @@
           <a:p>
             <a:pPr algn="l">
               <a:lnSpc>
-                <a:spcPts val="1087"/>
+                <a:spcPts val="1015"/>
               </a:lnSpc>
             </a:pPr>
             <a:r>
-              <a:rPr sz="750" b="1" spc="150">
+              <a:rPr sz="700" b="1" spc="200">
                 <a:solidFill>
-                  <a:srgbClr val="7A6686"/>
+                  <a:srgbClr val="6B7280"/>
                 </a:solidFill>
                 <a:latin typeface="맑은 고딕"/>
                 <a:ea typeface="맑은 고딕"/>
@@ -3344,14 +3199,14 @@
       </p:sp>
       <p:sp>
         <p:nvSpPr>
-          <p:cNvPr id="8" name="텍스트"/>
+          <p:cNvPr id="5" name="텍스트"/>
           <p:cNvSpPr txBox="1"/>
           <p:nvPr/>
         </p:nvSpPr>
         <p:spPr>
           <a:xfrm>
-            <a:off x="396000" y="540000"/>
-            <a:ext cx="2160000" cy="313692"/>
+            <a:off x="1692000" y="540000"/>
+            <a:ext cx="1368000" cy="360000"/>
           </a:xfrm>
           <a:prstGeom prst="rect">
             <a:avLst/>
@@ -3366,16 +3221,16 @@
           <a:p>
             <a:pPr algn="l">
               <a:lnSpc>
-                <a:spcPts val="2755"/>
+                <a:spcPts val="3190"/>
               </a:lnSpc>
             </a:pPr>
             <a:r>
-              <a:rPr sz="1900" b="1" spc="50">
+              <a:rPr sz="2200" b="1">
                 <a:solidFill>
-                  <a:srgbClr val="573371"/>
+                  <a:srgbClr val="12151C"/>
                 </a:solidFill>
-                <a:latin typeface="바탕"/>
-                <a:ea typeface="바탕"/>
+                <a:latin typeface="맑은 고딕"/>
+                <a:ea typeface="맑은 고딕"/>
               </a:rPr>
               <a:t>차예준</a:t>
             </a:r>
@@ -3384,14 +3239,14 @@
       </p:sp>
       <p:sp>
         <p:nvSpPr>
-          <p:cNvPr id="9" name="텍스트"/>
+          <p:cNvPr id="6" name="텍스트"/>
           <p:cNvSpPr txBox="1"/>
           <p:nvPr/>
         </p:nvSpPr>
         <p:spPr>
           <a:xfrm>
-            <a:off x="396000" y="835200"/>
-            <a:ext cx="2160000" cy="129600"/>
+            <a:off x="1692000" y="943200"/>
+            <a:ext cx="1368000" cy="171451"/>
           </a:xfrm>
           <a:prstGeom prst="rect">
             <a:avLst/>
@@ -3406,13 +3261,13 @@
           <a:p>
             <a:pPr algn="l">
               <a:lnSpc>
-                <a:spcPts val="1232"/>
+                <a:spcPts val="1305"/>
               </a:lnSpc>
             </a:pPr>
             <a:r>
-              <a:rPr sz="850" b="1">
+              <a:rPr sz="900" b="0">
                 <a:solidFill>
-                  <a:srgbClr val="6B7132"/>
+                  <a:srgbClr val="6B7280"/>
                 </a:solidFill>
                 <a:latin typeface="맑은 고딕"/>
                 <a:ea typeface="맑은 고딕"/>
@@ -3424,20 +3279,20 @@
       </p:sp>
       <p:sp>
         <p:nvSpPr>
-          <p:cNvPr id="10" name="Rectangle 9"/>
+          <p:cNvPr id="7" name="Rectangle 6"/>
           <p:cNvSpPr/>
           <p:nvPr/>
         </p:nvSpPr>
         <p:spPr>
           <a:xfrm>
-            <a:off x="396000" y="1051200"/>
-            <a:ext cx="230400" cy="14400"/>
+            <a:off x="1692000" y="1195200"/>
+            <a:ext cx="144000" cy="18000"/>
           </a:xfrm>
           <a:prstGeom prst="rect">
             <a:avLst/>
           </a:prstGeom>
           <a:solidFill>
-            <a:srgbClr val="868D3F"/>
+            <a:srgbClr val="A6E22E"/>
           </a:solidFill>
           <a:ln>
             <a:noFill/>
@@ -3453,14 +3308,14 @@
       </p:sp>
       <p:sp>
         <p:nvSpPr>
-          <p:cNvPr id="11" name="텍스트"/>
+          <p:cNvPr id="8" name="텍스트"/>
           <p:cNvSpPr txBox="1"/>
           <p:nvPr/>
         </p:nvSpPr>
         <p:spPr>
           <a:xfrm>
-            <a:off x="396000" y="1188000"/>
-            <a:ext cx="122400" cy="168911"/>
+            <a:off x="1692000" y="1328400"/>
+            <a:ext cx="331200" cy="99061"/>
           </a:xfrm>
           <a:prstGeom prst="rect">
             <a:avLst/>
@@ -3475,32 +3330,32 @@
           <a:p>
             <a:pPr algn="l">
               <a:lnSpc>
-                <a:spcPts val="1015"/>
+                <a:spcPts val="754"/>
               </a:lnSpc>
             </a:pPr>
             <a:r>
-              <a:rPr sz="700" b="1">
+              <a:rPr sz="520" b="1" spc="120">
                 <a:solidFill>
-                  <a:srgbClr val="6B7132"/>
+                  <a:srgbClr val="6B7280"/>
                 </a:solidFill>
                 <a:latin typeface="맑은 고딕"/>
                 <a:ea typeface="맑은 고딕"/>
               </a:rPr>
-              <a:t>T</a:t>
-            </a:r>
-          </a:p>
-        </p:txBody>
-      </p:sp>
-      <p:sp>
-        <p:nvSpPr>
-          <p:cNvPr id="12" name="텍스트"/>
+              <a:t>TEL</a:t>
+            </a:r>
+          </a:p>
+        </p:txBody>
+      </p:sp>
+      <p:sp>
+        <p:nvSpPr>
+          <p:cNvPr id="9" name="텍스트"/>
           <p:cNvSpPr txBox="1"/>
           <p:nvPr/>
         </p:nvSpPr>
         <p:spPr>
           <a:xfrm>
-            <a:off x="540000" y="1188000"/>
-            <a:ext cx="1872000" cy="168911"/>
+            <a:off x="2023200" y="1317600"/>
+            <a:ext cx="1188000" cy="125731"/>
           </a:xfrm>
           <a:prstGeom prst="rect">
             <a:avLst/>
@@ -3515,13 +3370,13 @@
           <a:p>
             <a:pPr algn="l">
               <a:lnSpc>
-                <a:spcPts val="1015"/>
+                <a:spcPts val="956"/>
               </a:lnSpc>
             </a:pPr>
             <a:r>
-              <a:rPr sz="700" b="0">
+              <a:rPr sz="660" b="0">
                 <a:solidFill>
-                  <a:srgbClr val="573371"/>
+                  <a:srgbClr val="12151C"/>
                 </a:solidFill>
                 <a:latin typeface="맑은 고딕"/>
                 <a:ea typeface="맑은 고딕"/>
@@ -3533,14 +3388,14 @@
       </p:sp>
       <p:sp>
         <p:nvSpPr>
-          <p:cNvPr id="13" name="텍스트"/>
+          <p:cNvPr id="10" name="텍스트"/>
           <p:cNvSpPr txBox="1"/>
           <p:nvPr/>
         </p:nvSpPr>
         <p:spPr>
           <a:xfrm>
-            <a:off x="396000" y="1356911"/>
-            <a:ext cx="122400" cy="168911"/>
+            <a:off x="1692000" y="1458000"/>
+            <a:ext cx="331200" cy="99061"/>
           </a:xfrm>
           <a:prstGeom prst="rect">
             <a:avLst/>
@@ -3555,32 +3410,32 @@
           <a:p>
             <a:pPr algn="l">
               <a:lnSpc>
-                <a:spcPts val="1015"/>
+                <a:spcPts val="754"/>
               </a:lnSpc>
             </a:pPr>
             <a:r>
-              <a:rPr sz="700" b="1">
+              <a:rPr sz="520" b="1" spc="120">
                 <a:solidFill>
-                  <a:srgbClr val="6B7132"/>
+                  <a:srgbClr val="6B7280"/>
                 </a:solidFill>
                 <a:latin typeface="맑은 고딕"/>
                 <a:ea typeface="맑은 고딕"/>
               </a:rPr>
-              <a:t>E</a:t>
-            </a:r>
-          </a:p>
-        </p:txBody>
-      </p:sp>
-      <p:sp>
-        <p:nvSpPr>
-          <p:cNvPr id="14" name="텍스트"/>
+              <a:t>MAIL</a:t>
+            </a:r>
+          </a:p>
+        </p:txBody>
+      </p:sp>
+      <p:sp>
+        <p:nvSpPr>
+          <p:cNvPr id="11" name="텍스트"/>
           <p:cNvSpPr txBox="1"/>
           <p:nvPr/>
         </p:nvSpPr>
         <p:spPr>
           <a:xfrm>
-            <a:off x="540000" y="1356911"/>
-            <a:ext cx="1872000" cy="168911"/>
+            <a:off x="2023200" y="1447200"/>
+            <a:ext cx="1188000" cy="125731"/>
           </a:xfrm>
           <a:prstGeom prst="rect">
             <a:avLst/>
@@ -3595,13 +3450,13 @@
           <a:p>
             <a:pPr algn="l">
               <a:lnSpc>
-                <a:spcPts val="1015"/>
+                <a:spcPts val="956"/>
               </a:lnSpc>
             </a:pPr>
             <a:r>
-              <a:rPr sz="700" b="0">
+              <a:rPr sz="660" b="0">
                 <a:solidFill>
-                  <a:srgbClr val="573371"/>
+                  <a:srgbClr val="12151C"/>
                 </a:solidFill>
                 <a:latin typeface="맑은 고딕"/>
                 <a:ea typeface="맑은 고딕"/>
@@ -3613,14 +3468,14 @@
       </p:sp>
       <p:sp>
         <p:nvSpPr>
-          <p:cNvPr id="15" name="텍스트"/>
+          <p:cNvPr id="12" name="텍스트"/>
           <p:cNvSpPr txBox="1"/>
           <p:nvPr/>
         </p:nvSpPr>
         <p:spPr>
           <a:xfrm>
-            <a:off x="396000" y="1525822"/>
-            <a:ext cx="122400" cy="168911"/>
+            <a:off x="1692000" y="1587600"/>
+            <a:ext cx="331200" cy="99061"/>
           </a:xfrm>
           <a:prstGeom prst="rect">
             <a:avLst/>
@@ -3635,32 +3490,32 @@
           <a:p>
             <a:pPr algn="l">
               <a:lnSpc>
-                <a:spcPts val="1015"/>
+                <a:spcPts val="754"/>
               </a:lnSpc>
             </a:pPr>
             <a:r>
-              <a:rPr sz="700" b="1">
+              <a:rPr sz="520" b="1" spc="120">
                 <a:solidFill>
-                  <a:srgbClr val="6B7132"/>
+                  <a:srgbClr val="6B7280"/>
                 </a:solidFill>
                 <a:latin typeface="맑은 고딕"/>
                 <a:ea typeface="맑은 고딕"/>
               </a:rPr>
-              <a:t>A</a:t>
-            </a:r>
-          </a:p>
-        </p:txBody>
-      </p:sp>
-      <p:sp>
-        <p:nvSpPr>
-          <p:cNvPr id="16" name="텍스트"/>
+              <a:t>ADDR</a:t>
+            </a:r>
+          </a:p>
+        </p:txBody>
+      </p:sp>
+      <p:sp>
+        <p:nvSpPr>
+          <p:cNvPr id="13" name="텍스트"/>
           <p:cNvSpPr txBox="1"/>
           <p:nvPr/>
         </p:nvSpPr>
         <p:spPr>
           <a:xfrm>
-            <a:off x="540000" y="1525822"/>
-            <a:ext cx="1872000" cy="168911"/>
+            <a:off x="2023200" y="1576800"/>
+            <a:ext cx="1188000" cy="125731"/>
           </a:xfrm>
           <a:prstGeom prst="rect">
             <a:avLst/>
@@ -3675,13 +3530,13 @@
           <a:p>
             <a:pPr algn="l">
               <a:lnSpc>
-                <a:spcPts val="1015"/>
+                <a:spcPts val="956"/>
               </a:lnSpc>
             </a:pPr>
             <a:r>
-              <a:rPr sz="700" b="0">
+              <a:rPr sz="660" b="0">
                 <a:solidFill>
-                  <a:srgbClr val="573371"/>
+                  <a:srgbClr val="12151C"/>
                 </a:solidFill>
                 <a:latin typeface="맑은 고딕"/>
                 <a:ea typeface="맑은 고딕"/>
@@ -3705,7 +3560,7 @@
     <p:bg>
       <p:bgPr>
         <a:solidFill>
-          <a:srgbClr val="FBF8F2"/>
+          <a:srgbClr val="F6FCEA"/>
         </a:solidFill>
         <a:effectLst/>
       </p:bgPr>
@@ -3719,190 +3574,14 @@
       <p:grpSpPr/>
       <p:sp>
         <p:nvSpPr>
-          <p:cNvPr id="2" name="Rectangle 1"/>
-          <p:cNvSpPr/>
+          <p:cNvPr id="2" name="텍스트"/>
+          <p:cNvSpPr txBox="1"/>
           <p:nvPr/>
         </p:nvSpPr>
         <p:spPr>
           <a:xfrm>
-            <a:off x="0" y="0"/>
-            <a:ext cx="3240000" cy="1800000"/>
-          </a:xfrm>
-          <a:prstGeom prst="rect">
-            <a:avLst/>
-          </a:prstGeom>
-          <a:solidFill>
-            <a:srgbClr val="868D3F"/>
-          </a:solidFill>
-          <a:ln>
-            <a:noFill/>
-          </a:ln>
-        </p:spPr>
-        <p:txBody>
-          <a:bodyPr rtlCol="0" anchor="ctr"/>
-          <a:lstStyle/>
-          <a:p>
-            <a:pPr algn="ctr"/>
-          </a:p>
-        </p:txBody>
-      </p:sp>
-      <p:sp>
-        <p:nvSpPr>
-          <p:cNvPr id="3" name="Freeform 2"/>
-          <p:cNvSpPr/>
-          <p:nvPr/>
-        </p:nvSpPr>
-        <p:spPr>
-          <a:xfrm>
-            <a:off x="1541514" y="406549"/>
-            <a:ext cx="198625" cy="217262"/>
-          </a:xfrm>
-          <a:custGeom>
-            <a:avLst/>
-            <a:gdLst/>
-            <a:ahLst/>
-            <a:cxnLst/>
-            <a:rect l="l" t="t" r="r" b="b"/>
-            <a:pathLst>
-              <a:path w="198625" h="217262">
-                <a:moveTo>
-                  <a:pt x="143470" y="0"/>
-                </a:moveTo>
-                <a:lnTo>
-                  <a:pt x="198625" y="46281"/>
-                </a:lnTo>
-                <a:lnTo>
-                  <a:pt x="55155" y="217262"/>
-                </a:lnTo>
-                <a:lnTo>
-                  <a:pt x="0" y="170981"/>
-                </a:lnTo>
-                <a:close/>
-              </a:path>
-            </a:pathLst>
-          </a:custGeom>
-          <a:solidFill>
-            <a:srgbClr val="FFFFFF"/>
-          </a:solidFill>
-          <a:ln>
-            <a:noFill/>
-          </a:ln>
-        </p:spPr>
-        <p:txBody>
-          <a:bodyPr rtlCol="0" anchor="ctr"/>
-          <a:lstStyle/>
-          <a:p>
-            <a:pPr algn="ctr"/>
-          </a:p>
-        </p:txBody>
-      </p:sp>
-      <p:sp>
-        <p:nvSpPr>
-          <p:cNvPr id="4" name="Freeform 3"/>
-          <p:cNvSpPr/>
-          <p:nvPr/>
-        </p:nvSpPr>
-        <p:spPr>
-          <a:xfrm>
-            <a:off x="1518182" y="577530"/>
-            <a:ext cx="78487" cy="83811"/>
-          </a:xfrm>
-          <a:custGeom>
-            <a:avLst/>
-            <a:gdLst/>
-            <a:ahLst/>
-            <a:cxnLst/>
-            <a:rect l="l" t="t" r="r" b="b"/>
-            <a:pathLst>
-              <a:path w="78487" h="83811">
-                <a:moveTo>
-                  <a:pt x="23332" y="0"/>
-                </a:moveTo>
-                <a:lnTo>
-                  <a:pt x="78487" y="46281"/>
-                </a:lnTo>
-                <a:lnTo>
-                  <a:pt x="0" y="83811"/>
-                </a:lnTo>
-                <a:close/>
-              </a:path>
-            </a:pathLst>
-          </a:custGeom>
-          <a:solidFill>
-            <a:srgbClr val="737373"/>
-          </a:solidFill>
-          <a:ln>
-            <a:noFill/>
-          </a:ln>
-        </p:spPr>
-        <p:txBody>
-          <a:bodyPr rtlCol="0" anchor="ctr"/>
-          <a:lstStyle/>
-          <a:p>
-            <a:pPr algn="ctr"/>
-          </a:p>
-        </p:txBody>
-      </p:sp>
-      <p:sp>
-        <p:nvSpPr>
-          <p:cNvPr id="5" name="Freeform 4"/>
-          <p:cNvSpPr/>
-          <p:nvPr/>
-        </p:nvSpPr>
-        <p:spPr>
-          <a:xfrm>
-            <a:off x="1684984" y="378972"/>
-            <a:ext cx="78295" cy="73858"/>
-          </a:xfrm>
-          <a:custGeom>
-            <a:avLst/>
-            <a:gdLst/>
-            <a:ahLst/>
-            <a:cxnLst/>
-            <a:rect l="l" t="t" r="r" b="b"/>
-            <a:pathLst>
-              <a:path w="78295" h="73858">
-                <a:moveTo>
-                  <a:pt x="23140" y="0"/>
-                </a:moveTo>
-                <a:lnTo>
-                  <a:pt x="78295" y="46280"/>
-                </a:lnTo>
-                <a:lnTo>
-                  <a:pt x="55155" y="73858"/>
-                </a:lnTo>
-                <a:lnTo>
-                  <a:pt x="0" y="27577"/>
-                </a:lnTo>
-                <a:close/>
-              </a:path>
-            </a:pathLst>
-          </a:custGeom>
-          <a:solidFill>
-            <a:srgbClr val="737373"/>
-          </a:solidFill>
-          <a:ln>
-            <a:noFill/>
-          </a:ln>
-        </p:spPr>
-        <p:txBody>
-          <a:bodyPr rtlCol="0" anchor="ctr"/>
-          <a:lstStyle/>
-          <a:p>
-            <a:pPr algn="ctr"/>
-          </a:p>
-        </p:txBody>
-      </p:sp>
-      <p:sp>
-        <p:nvSpPr>
-          <p:cNvPr id="6" name="텍스트"/>
-          <p:cNvSpPr txBox="1"/>
-          <p:nvPr/>
-        </p:nvSpPr>
-        <p:spPr>
-          <a:xfrm>
-            <a:off x="396000" y="835200"/>
-            <a:ext cx="2448000" cy="396000"/>
+            <a:off x="252000" y="324000"/>
+            <a:ext cx="2520000" cy="792000"/>
           </a:xfrm>
           <a:prstGeom prst="rect">
             <a:avLst/>
@@ -3910,20 +3589,20 @@
           <a:noFill/>
         </p:spPr>
         <p:txBody>
-          <a:bodyPr wrap="square" lIns="0" rIns="0" tIns="0" bIns="0" anchor="ctr">
+          <a:bodyPr wrap="square" lIns="0" rIns="0" tIns="0" bIns="0" anchor="t">
             <a:spAutoFit/>
           </a:bodyPr>
           <a:lstStyle/>
           <a:p>
-            <a:pPr algn="ctr">
+            <a:pPr algn="l">
               <a:lnSpc>
-                <a:spcPts val="1667"/>
+                <a:spcPts val="1884"/>
               </a:lnSpc>
             </a:pPr>
             <a:r>
-              <a:rPr sz="1150" b="1">
+              <a:rPr sz="1300" b="1">
                 <a:solidFill>
-                  <a:srgbClr val="FFFFFF"/>
+                  <a:srgbClr val="12151C"/>
                 </a:solidFill>
                 <a:latin typeface="맑은 고딕"/>
                 <a:ea typeface="맑은 고딕"/>
@@ -3935,14 +3614,43 @@
       </p:sp>
       <p:sp>
         <p:nvSpPr>
-          <p:cNvPr id="7" name="텍스트"/>
+          <p:cNvPr id="3" name="Rectangle 2"/>
+          <p:cNvSpPr/>
+          <p:nvPr/>
+        </p:nvSpPr>
+        <p:spPr>
+          <a:xfrm>
+            <a:off x="0" y="1476000"/>
+            <a:ext cx="3240000" cy="324000"/>
+          </a:xfrm>
+          <a:prstGeom prst="rect">
+            <a:avLst/>
+          </a:prstGeom>
+          <a:solidFill>
+            <a:srgbClr val="A6E22E"/>
+          </a:solidFill>
+          <a:ln>
+            <a:noFill/>
+          </a:ln>
+        </p:spPr>
+        <p:txBody>
+          <a:bodyPr rtlCol="0" anchor="ctr"/>
+          <a:lstStyle/>
+          <a:p>
+            <a:pPr algn="ctr"/>
+          </a:p>
+        </p:txBody>
+      </p:sp>
+      <p:sp>
+        <p:nvSpPr>
+          <p:cNvPr id="4" name="텍스트"/>
           <p:cNvSpPr txBox="1"/>
           <p:nvPr/>
         </p:nvSpPr>
         <p:spPr>
           <a:xfrm>
-            <a:off x="360000" y="1476000"/>
-            <a:ext cx="2520000" cy="108000"/>
+            <a:off x="252000" y="1569600"/>
+            <a:ext cx="1872000" cy="142876"/>
           </a:xfrm>
           <a:prstGeom prst="rect">
             <a:avLst/>
@@ -3955,21 +3663,112 @@
           </a:bodyPr>
           <a:lstStyle/>
           <a:p>
-            <a:pPr algn="ctr">
+            <a:pPr algn="l">
               <a:lnSpc>
-                <a:spcPts val="1015"/>
+                <a:spcPts val="1087"/>
               </a:lnSpc>
             </a:pPr>
             <a:r>
-              <a:rPr sz="700" b="1" spc="300">
+              <a:rPr sz="750" b="1" spc="200">
                 <a:solidFill>
-                  <a:srgbClr val="FFFFFF"/>
+                  <a:srgbClr val="12151C"/>
                 </a:solidFill>
                 <a:latin typeface="맑은 고딕"/>
                 <a:ea typeface="맑은 고딕"/>
               </a:rPr>
               <a:t>학교 · 학원 이름</a:t>
             </a:r>
+          </a:p>
+        </p:txBody>
+      </p:sp>
+      <p:sp>
+        <p:nvSpPr>
+          <p:cNvPr id="5" name="Oval 4"/>
+          <p:cNvSpPr/>
+          <p:nvPr/>
+        </p:nvSpPr>
+        <p:spPr>
+          <a:xfrm>
+            <a:off x="2714400" y="1616400"/>
+            <a:ext cx="43200" cy="43200"/>
+          </a:xfrm>
+          <a:prstGeom prst="ellipse">
+            <a:avLst/>
+          </a:prstGeom>
+          <a:solidFill>
+            <a:srgbClr val="12151C"/>
+          </a:solidFill>
+          <a:ln>
+            <a:noFill/>
+          </a:ln>
+        </p:spPr>
+        <p:txBody>
+          <a:bodyPr rtlCol="0" anchor="ctr"/>
+          <a:lstStyle/>
+          <a:p>
+            <a:pPr algn="ctr"/>
+          </a:p>
+        </p:txBody>
+      </p:sp>
+      <p:sp>
+        <p:nvSpPr>
+          <p:cNvPr id="6" name="Oval 5"/>
+          <p:cNvSpPr/>
+          <p:nvPr/>
+        </p:nvSpPr>
+        <p:spPr>
+          <a:xfrm>
+            <a:off x="2822400" y="1616400"/>
+            <a:ext cx="43200" cy="43200"/>
+          </a:xfrm>
+          <a:prstGeom prst="ellipse">
+            <a:avLst/>
+          </a:prstGeom>
+          <a:solidFill>
+            <a:srgbClr val="12151C">
+              <a:alpha val="50000"/>
+            </a:srgbClr>
+          </a:solidFill>
+          <a:ln>
+            <a:noFill/>
+          </a:ln>
+        </p:spPr>
+        <p:txBody>
+          <a:bodyPr rtlCol="0" anchor="ctr"/>
+          <a:lstStyle/>
+          <a:p>
+            <a:pPr algn="ctr"/>
+          </a:p>
+        </p:txBody>
+      </p:sp>
+      <p:sp>
+        <p:nvSpPr>
+          <p:cNvPr id="7" name="Oval 6"/>
+          <p:cNvSpPr/>
+          <p:nvPr/>
+        </p:nvSpPr>
+        <p:spPr>
+          <a:xfrm>
+            <a:off x="2930400" y="1616400"/>
+            <a:ext cx="43200" cy="43200"/>
+          </a:xfrm>
+          <a:prstGeom prst="ellipse">
+            <a:avLst/>
+          </a:prstGeom>
+          <a:solidFill>
+            <a:srgbClr val="12151C">
+              <a:alpha val="50000"/>
+            </a:srgbClr>
+          </a:solidFill>
+          <a:ln>
+            <a:noFill/>
+          </a:ln>
+        </p:spPr>
+        <p:txBody>
+          <a:bodyPr rtlCol="0" anchor="ctr"/>
+          <a:lstStyle/>
+          <a:p>
+            <a:pPr algn="ctr"/>
           </a:p>
         </p:txBody>
       </p:sp>

--- a/public/fun/cards/teacher/teacher-31.pptx
+++ b/public/fun/cards/teacher/teacher-31.pptx
@@ -3097,196 +3097,37 @@
         <p:nvPr/>
       </p:nvGrpSpPr>
       <p:grpSpPr/>
-      <p:sp>
-        <p:nvSpPr>
-          <p:cNvPr id="2" name="Oval 1"/>
+      <p:cxnSp>
+        <p:nvCxnSpPr>
+          <p:cNvPr id="2" name="Connector 1"/>
+          <p:cNvCxnSpPr/>
+          <p:nvPr/>
+        </p:nvCxnSpPr>
+        <p:spPr>
+          <a:xfrm>
+            <a:off x="1080000" y="252000"/>
+            <a:ext cx="0" cy="1296000"/>
+          </a:xfrm>
+          <a:prstGeom prst="line">
+            <a:avLst/>
+          </a:prstGeom>
+          <a:ln w="3600">
+            <a:solidFill>
+              <a:srgbClr val="DCDFE4"/>
+            </a:solidFill>
+          </a:ln>
+        </p:spPr>
+      </p:cxnSp>
+      <p:sp>
+        <p:nvSpPr>
+          <p:cNvPr id="3" name="Rectangle 2"/>
           <p:cNvSpPr/>
           <p:nvPr/>
         </p:nvSpPr>
         <p:spPr>
           <a:xfrm>
-            <a:off x="547200" y="475200"/>
-            <a:ext cx="849600" cy="849600"/>
-          </a:xfrm>
-          <a:prstGeom prst="ellipse">
-            <a:avLst/>
-          </a:prstGeom>
-          <a:solidFill>
-            <a:srgbClr val="E8F1DA"/>
-          </a:solidFill>
-          <a:ln>
-            <a:noFill/>
-          </a:ln>
-        </p:spPr>
-        <p:txBody>
-          <a:bodyPr rtlCol="0" anchor="ctr"/>
-          <a:lstStyle/>
-          <a:p>
-            <a:pPr algn="ctr"/>
-          </a:p>
-        </p:txBody>
-      </p:sp>
-      <p:sp>
-        <p:nvSpPr>
-          <p:cNvPr id="3" name="Oval 2"/>
-          <p:cNvSpPr/>
-          <p:nvPr/>
-        </p:nvSpPr>
-        <p:spPr>
-          <a:xfrm>
-            <a:off x="187200" y="475200"/>
-            <a:ext cx="849600" cy="849600"/>
-          </a:xfrm>
-          <a:prstGeom prst="ellipse">
-            <a:avLst/>
-          </a:prstGeom>
-          <a:solidFill>
-            <a:srgbClr val="A6E22E">
-              <a:alpha val="92000"/>
-            </a:srgbClr>
-          </a:solidFill>
-          <a:ln>
-            <a:noFill/>
-          </a:ln>
-        </p:spPr>
-        <p:txBody>
-          <a:bodyPr rtlCol="0" anchor="ctr"/>
-          <a:lstStyle/>
-          <a:p>
-            <a:pPr algn="ctr"/>
-          </a:p>
-        </p:txBody>
-      </p:sp>
-      <p:sp>
-        <p:nvSpPr>
-          <p:cNvPr id="4" name="텍스트"/>
-          <p:cNvSpPr txBox="1"/>
-          <p:nvPr/>
-        </p:nvSpPr>
-        <p:spPr>
-          <a:xfrm>
-            <a:off x="1692000" y="223200"/>
-            <a:ext cx="1296000" cy="133351"/>
-          </a:xfrm>
-          <a:prstGeom prst="rect">
-            <a:avLst/>
-          </a:prstGeom>
-          <a:noFill/>
-        </p:spPr>
-        <p:txBody>
-          <a:bodyPr wrap="square" lIns="0" rIns="0" tIns="0" bIns="0" anchor="t">
-            <a:spAutoFit/>
-          </a:bodyPr>
-          <a:lstStyle/>
-          <a:p>
-            <a:pPr algn="l">
-              <a:lnSpc>
-                <a:spcPts val="1015"/>
-              </a:lnSpc>
-            </a:pPr>
-            <a:r>
-              <a:rPr sz="700" b="1" spc="200">
-                <a:solidFill>
-                  <a:srgbClr val="6B7280"/>
-                </a:solidFill>
-                <a:latin typeface="맑은 고딕"/>
-                <a:ea typeface="맑은 고딕"/>
-              </a:rPr>
-              <a:t>학교 · 학원 이름</a:t>
-            </a:r>
-          </a:p>
-        </p:txBody>
-      </p:sp>
-      <p:sp>
-        <p:nvSpPr>
-          <p:cNvPr id="5" name="텍스트"/>
-          <p:cNvSpPr txBox="1"/>
-          <p:nvPr/>
-        </p:nvSpPr>
-        <p:spPr>
-          <a:xfrm>
-            <a:off x="1692000" y="540000"/>
-            <a:ext cx="1368000" cy="360000"/>
-          </a:xfrm>
-          <a:prstGeom prst="rect">
-            <a:avLst/>
-          </a:prstGeom>
-          <a:noFill/>
-        </p:spPr>
-        <p:txBody>
-          <a:bodyPr wrap="square" lIns="0" rIns="0" tIns="0" bIns="0" anchor="t">
-            <a:spAutoFit/>
-          </a:bodyPr>
-          <a:lstStyle/>
-          <a:p>
-            <a:pPr algn="l">
-              <a:lnSpc>
-                <a:spcPts val="3190"/>
-              </a:lnSpc>
-            </a:pPr>
-            <a:r>
-              <a:rPr sz="2200" b="1">
-                <a:solidFill>
-                  <a:srgbClr val="12151C"/>
-                </a:solidFill>
-                <a:latin typeface="맑은 고딕"/>
-                <a:ea typeface="맑은 고딕"/>
-              </a:rPr>
-              <a:t>차예준</a:t>
-            </a:r>
-          </a:p>
-        </p:txBody>
-      </p:sp>
-      <p:sp>
-        <p:nvSpPr>
-          <p:cNvPr id="6" name="텍스트"/>
-          <p:cNvSpPr txBox="1"/>
-          <p:nvPr/>
-        </p:nvSpPr>
-        <p:spPr>
-          <a:xfrm>
-            <a:off x="1692000" y="943200"/>
-            <a:ext cx="1368000" cy="171451"/>
-          </a:xfrm>
-          <a:prstGeom prst="rect">
-            <a:avLst/>
-          </a:prstGeom>
-          <a:noFill/>
-        </p:spPr>
-        <p:txBody>
-          <a:bodyPr wrap="square" lIns="0" rIns="0" tIns="0" bIns="0" anchor="t">
-            <a:spAutoFit/>
-          </a:bodyPr>
-          <a:lstStyle/>
-          <a:p>
-            <a:pPr algn="l">
-              <a:lnSpc>
-                <a:spcPts val="1305"/>
-              </a:lnSpc>
-            </a:pPr>
-            <a:r>
-              <a:rPr sz="900" b="0">
-                <a:solidFill>
-                  <a:srgbClr val="6B7280"/>
-                </a:solidFill>
-                <a:latin typeface="맑은 고딕"/>
-                <a:ea typeface="맑은 고딕"/>
-              </a:rPr>
-              <a:t>담임 교사</a:t>
-            </a:r>
-          </a:p>
-        </p:txBody>
-      </p:sp>
-      <p:sp>
-        <p:nvSpPr>
-          <p:cNvPr id="7" name="Rectangle 6"/>
-          <p:cNvSpPr/>
-          <p:nvPr/>
-        </p:nvSpPr>
-        <p:spPr>
-          <a:xfrm>
-            <a:off x="1692000" y="1195200"/>
-            <a:ext cx="144000" cy="18000"/>
+            <a:off x="1069200" y="252000"/>
+            <a:ext cx="21600" cy="201600"/>
           </a:xfrm>
           <a:prstGeom prst="rect">
             <a:avLst/>
@@ -3308,14 +3149,14 @@
       </p:sp>
       <p:sp>
         <p:nvSpPr>
-          <p:cNvPr id="8" name="텍스트"/>
+          <p:cNvPr id="4" name="텍스트"/>
           <p:cNvSpPr txBox="1"/>
           <p:nvPr/>
         </p:nvSpPr>
         <p:spPr>
           <a:xfrm>
-            <a:off x="1692000" y="1328400"/>
-            <a:ext cx="331200" cy="99061"/>
+            <a:off x="252000" y="252000"/>
+            <a:ext cx="756000" cy="123826"/>
           </a:xfrm>
           <a:prstGeom prst="rect">
             <a:avLst/>
@@ -3330,11 +3171,221 @@
           <a:p>
             <a:pPr algn="l">
               <a:lnSpc>
-                <a:spcPts val="754"/>
+                <a:spcPts val="942"/>
               </a:lnSpc>
             </a:pPr>
             <a:r>
-              <a:rPr sz="520" b="1" spc="120">
+              <a:rPr sz="650" b="1" spc="220">
+                <a:solidFill>
+                  <a:srgbClr val="6B7280"/>
+                </a:solidFill>
+                <a:latin typeface="맑은 고딕"/>
+                <a:ea typeface="맑은 고딕"/>
+              </a:rPr>
+              <a:t>학교 · 학원 이름</a:t>
+            </a:r>
+          </a:p>
+        </p:txBody>
+      </p:sp>
+      <p:sp>
+        <p:nvSpPr>
+          <p:cNvPr id="5" name="Oval 4"/>
+          <p:cNvSpPr/>
+          <p:nvPr/>
+        </p:nvSpPr>
+        <p:spPr>
+          <a:xfrm>
+            <a:off x="273600" y="734400"/>
+            <a:ext cx="244800" cy="244800"/>
+          </a:xfrm>
+          <a:prstGeom prst="ellipse">
+            <a:avLst/>
+          </a:prstGeom>
+          <a:noFill/>
+          <a:ln w="5040">
+            <a:solidFill>
+              <a:srgbClr val="A6E22E"/>
+            </a:solidFill>
+          </a:ln>
+        </p:spPr>
+        <p:txBody>
+          <a:bodyPr rtlCol="0" anchor="ctr"/>
+          <a:lstStyle/>
+          <a:p>
+            <a:pPr algn="ctr"/>
+          </a:p>
+        </p:txBody>
+      </p:sp>
+      <p:sp>
+        <p:nvSpPr>
+          <p:cNvPr id="6" name="텍스트"/>
+          <p:cNvSpPr txBox="1"/>
+          <p:nvPr/>
+        </p:nvSpPr>
+        <p:spPr>
+          <a:xfrm>
+            <a:off x="252000" y="734400"/>
+            <a:ext cx="288000" cy="252000"/>
+          </a:xfrm>
+          <a:prstGeom prst="rect">
+            <a:avLst/>
+          </a:prstGeom>
+          <a:noFill/>
+        </p:spPr>
+        <p:txBody>
+          <a:bodyPr wrap="square" lIns="0" rIns="0" tIns="0" bIns="0" anchor="ctr">
+            <a:spAutoFit/>
+          </a:bodyPr>
+          <a:lstStyle/>
+          <a:p>
+            <a:pPr algn="ctr">
+              <a:lnSpc>
+                <a:spcPts val="1305"/>
+              </a:lnSpc>
+            </a:pPr>
+            <a:r>
+              <a:rPr sz="900" b="1">
+                <a:solidFill>
+                  <a:srgbClr val="A6E22E"/>
+                </a:solidFill>
+                <a:latin typeface="맑은 고딕"/>
+                <a:ea typeface="맑은 고딕"/>
+              </a:rPr>
+              <a:t>학</a:t>
+            </a:r>
+          </a:p>
+        </p:txBody>
+      </p:sp>
+      <p:sp>
+        <p:nvSpPr>
+          <p:cNvPr id="7" name="텍스트"/>
+          <p:cNvSpPr txBox="1"/>
+          <p:nvPr/>
+        </p:nvSpPr>
+        <p:spPr>
+          <a:xfrm>
+            <a:off x="1260000" y="432000"/>
+            <a:ext cx="1800000" cy="237600"/>
+          </a:xfrm>
+          <a:prstGeom prst="rect">
+            <a:avLst/>
+          </a:prstGeom>
+          <a:noFill/>
+        </p:spPr>
+        <p:txBody>
+          <a:bodyPr wrap="square" lIns="0" rIns="0" tIns="0" bIns="0" anchor="t">
+            <a:spAutoFit/>
+          </a:bodyPr>
+          <a:lstStyle/>
+          <a:p>
+            <a:pPr algn="l">
+              <a:lnSpc>
+                <a:spcPts val="1957"/>
+              </a:lnSpc>
+            </a:pPr>
+            <a:r>
+              <a:rPr sz="1350" b="1" spc="120">
+                <a:solidFill>
+                  <a:srgbClr val="12151C"/>
+                </a:solidFill>
+                <a:latin typeface="맑은 고딕"/>
+                <a:ea typeface="맑은 고딕"/>
+              </a:rPr>
+              <a:t>차예준</a:t>
+            </a:r>
+          </a:p>
+        </p:txBody>
+      </p:sp>
+      <p:sp>
+        <p:nvSpPr>
+          <p:cNvPr id="8" name="텍스트"/>
+          <p:cNvSpPr txBox="1"/>
+          <p:nvPr/>
+        </p:nvSpPr>
+        <p:spPr>
+          <a:xfrm>
+            <a:off x="1260000" y="684000"/>
+            <a:ext cx="1800000" cy="133351"/>
+          </a:xfrm>
+          <a:prstGeom prst="rect">
+            <a:avLst/>
+          </a:prstGeom>
+          <a:noFill/>
+        </p:spPr>
+        <p:txBody>
+          <a:bodyPr wrap="square" lIns="0" rIns="0" tIns="0" bIns="0" anchor="t">
+            <a:spAutoFit/>
+          </a:bodyPr>
+          <a:lstStyle/>
+          <a:p>
+            <a:pPr algn="l">
+              <a:lnSpc>
+                <a:spcPts val="1015"/>
+              </a:lnSpc>
+            </a:pPr>
+            <a:r>
+              <a:rPr sz="700" b="0" spc="60">
+                <a:solidFill>
+                  <a:srgbClr val="6B7280"/>
+                </a:solidFill>
+                <a:latin typeface="맑은 고딕"/>
+                <a:ea typeface="맑은 고딕"/>
+              </a:rPr>
+              <a:t>담임 교사</a:t>
+            </a:r>
+          </a:p>
+        </p:txBody>
+      </p:sp>
+      <p:cxnSp>
+        <p:nvCxnSpPr>
+          <p:cNvPr id="9" name="Connector 8"/>
+          <p:cNvCxnSpPr/>
+          <p:nvPr/>
+        </p:nvCxnSpPr>
+        <p:spPr>
+          <a:xfrm>
+            <a:off x="1260000" y="943200"/>
+            <a:ext cx="1728000" cy="0"/>
+          </a:xfrm>
+          <a:prstGeom prst="line">
+            <a:avLst/>
+          </a:prstGeom>
+          <a:ln w="3600">
+            <a:solidFill>
+              <a:srgbClr val="DCDFE4"/>
+            </a:solidFill>
+          </a:ln>
+        </p:spPr>
+      </p:cxnSp>
+      <p:sp>
+        <p:nvSpPr>
+          <p:cNvPr id="10" name="텍스트"/>
+          <p:cNvSpPr txBox="1"/>
+          <p:nvPr/>
+        </p:nvSpPr>
+        <p:spPr>
+          <a:xfrm>
+            <a:off x="1260000" y="1054800"/>
+            <a:ext cx="331200" cy="91441"/>
+          </a:xfrm>
+          <a:prstGeom prst="rect">
+            <a:avLst/>
+          </a:prstGeom>
+          <a:noFill/>
+        </p:spPr>
+        <p:txBody>
+          <a:bodyPr wrap="square" lIns="0" rIns="0" tIns="0" bIns="0" anchor="t">
+            <a:spAutoFit/>
+          </a:bodyPr>
+          <a:lstStyle/>
+          <a:p>
+            <a:pPr algn="l">
+              <a:lnSpc>
+                <a:spcPts val="696"/>
+              </a:lnSpc>
+            </a:pPr>
+            <a:r>
+              <a:rPr sz="480" b="1" spc="140">
                 <a:solidFill>
                   <a:srgbClr val="6B7280"/>
                 </a:solidFill>
@@ -3348,14 +3399,14 @@
       </p:sp>
       <p:sp>
         <p:nvSpPr>
-          <p:cNvPr id="9" name="텍스트"/>
+          <p:cNvPr id="11" name="텍스트"/>
           <p:cNvSpPr txBox="1"/>
           <p:nvPr/>
         </p:nvSpPr>
         <p:spPr>
           <a:xfrm>
-            <a:off x="2023200" y="1317600"/>
-            <a:ext cx="1188000" cy="125731"/>
+            <a:off x="1591200" y="1044000"/>
+            <a:ext cx="1188000" cy="123826"/>
           </a:xfrm>
           <a:prstGeom prst="rect">
             <a:avLst/>
@@ -3370,11 +3421,11 @@
           <a:p>
             <a:pPr algn="l">
               <a:lnSpc>
-                <a:spcPts val="956"/>
+                <a:spcPts val="942"/>
               </a:lnSpc>
             </a:pPr>
             <a:r>
-              <a:rPr sz="660" b="0">
+              <a:rPr sz="650" b="0">
                 <a:solidFill>
                   <a:srgbClr val="12151C"/>
                 </a:solidFill>
@@ -3388,14 +3439,14 @@
       </p:sp>
       <p:sp>
         <p:nvSpPr>
-          <p:cNvPr id="10" name="텍스트"/>
+          <p:cNvPr id="12" name="텍스트"/>
           <p:cNvSpPr txBox="1"/>
           <p:nvPr/>
         </p:nvSpPr>
         <p:spPr>
           <a:xfrm>
-            <a:off x="1692000" y="1458000"/>
-            <a:ext cx="331200" cy="99061"/>
+            <a:off x="1260000" y="1184400"/>
+            <a:ext cx="331200" cy="91441"/>
           </a:xfrm>
           <a:prstGeom prst="rect">
             <a:avLst/>
@@ -3410,11 +3461,11 @@
           <a:p>
             <a:pPr algn="l">
               <a:lnSpc>
-                <a:spcPts val="754"/>
+                <a:spcPts val="696"/>
               </a:lnSpc>
             </a:pPr>
             <a:r>
-              <a:rPr sz="520" b="1" spc="120">
+              <a:rPr sz="480" b="1" spc="140">
                 <a:solidFill>
                   <a:srgbClr val="6B7280"/>
                 </a:solidFill>
@@ -3428,14 +3479,14 @@
       </p:sp>
       <p:sp>
         <p:nvSpPr>
-          <p:cNvPr id="11" name="텍스트"/>
+          <p:cNvPr id="13" name="텍스트"/>
           <p:cNvSpPr txBox="1"/>
           <p:nvPr/>
         </p:nvSpPr>
         <p:spPr>
           <a:xfrm>
-            <a:off x="2023200" y="1447200"/>
-            <a:ext cx="1188000" cy="125731"/>
+            <a:off x="1591200" y="1173600"/>
+            <a:ext cx="1188000" cy="123826"/>
           </a:xfrm>
           <a:prstGeom prst="rect">
             <a:avLst/>
@@ -3450,11 +3501,11 @@
           <a:p>
             <a:pPr algn="l">
               <a:lnSpc>
-                <a:spcPts val="956"/>
+                <a:spcPts val="942"/>
               </a:lnSpc>
             </a:pPr>
             <a:r>
-              <a:rPr sz="660" b="0">
+              <a:rPr sz="650" b="0">
                 <a:solidFill>
                   <a:srgbClr val="12151C"/>
                 </a:solidFill>
@@ -3468,14 +3519,14 @@
       </p:sp>
       <p:sp>
         <p:nvSpPr>
-          <p:cNvPr id="12" name="텍스트"/>
+          <p:cNvPr id="14" name="텍스트"/>
           <p:cNvSpPr txBox="1"/>
           <p:nvPr/>
         </p:nvSpPr>
         <p:spPr>
           <a:xfrm>
-            <a:off x="1692000" y="1587600"/>
-            <a:ext cx="331200" cy="99061"/>
+            <a:off x="1260000" y="1314000"/>
+            <a:ext cx="331200" cy="91441"/>
           </a:xfrm>
           <a:prstGeom prst="rect">
             <a:avLst/>
@@ -3490,11 +3541,11 @@
           <a:p>
             <a:pPr algn="l">
               <a:lnSpc>
-                <a:spcPts val="754"/>
+                <a:spcPts val="696"/>
               </a:lnSpc>
             </a:pPr>
             <a:r>
-              <a:rPr sz="520" b="1" spc="120">
+              <a:rPr sz="480" b="1" spc="140">
                 <a:solidFill>
                   <a:srgbClr val="6B7280"/>
                 </a:solidFill>
@@ -3508,14 +3559,14 @@
       </p:sp>
       <p:sp>
         <p:nvSpPr>
-          <p:cNvPr id="13" name="텍스트"/>
+          <p:cNvPr id="15" name="텍스트"/>
           <p:cNvSpPr txBox="1"/>
           <p:nvPr/>
         </p:nvSpPr>
         <p:spPr>
           <a:xfrm>
-            <a:off x="2023200" y="1576800"/>
-            <a:ext cx="1188000" cy="125731"/>
+            <a:off x="1591200" y="1303200"/>
+            <a:ext cx="1188000" cy="123826"/>
           </a:xfrm>
           <a:prstGeom prst="rect">
             <a:avLst/>
@@ -3530,11 +3581,11 @@
           <a:p>
             <a:pPr algn="l">
               <a:lnSpc>
-                <a:spcPts val="956"/>
+                <a:spcPts val="942"/>
               </a:lnSpc>
             </a:pPr>
             <a:r>
-              <a:rPr sz="660" b="0">
+              <a:rPr sz="650" b="0">
                 <a:solidFill>
                   <a:srgbClr val="12151C"/>
                 </a:solidFill>
@@ -3580,8 +3631,8 @@
         </p:nvSpPr>
         <p:spPr>
           <a:xfrm>
-            <a:off x="252000" y="324000"/>
-            <a:ext cx="2520000" cy="792000"/>
+            <a:off x="252000" y="252000"/>
+            <a:ext cx="1080000" cy="99061"/>
           </a:xfrm>
           <a:prstGeom prst="rect">
             <a:avLst/>
@@ -3596,18 +3647,18 @@
           <a:p>
             <a:pPr algn="l">
               <a:lnSpc>
-                <a:spcPts val="1884"/>
+                <a:spcPts val="754"/>
               </a:lnSpc>
             </a:pPr>
             <a:r>
-              <a:rPr sz="1300" b="1">
+              <a:rPr sz="520" b="1" spc="240">
                 <a:solidFill>
-                  <a:srgbClr val="12151C"/>
+                  <a:srgbClr val="4A6323"/>
                 </a:solidFill>
                 <a:latin typeface="맑은 고딕"/>
                 <a:ea typeface="맑은 고딕"/>
               </a:rPr>
-              <a:t>꿈꾸는 아이를 꿈꾸게 합니다</a:t>
+              <a:t>수업 안내</a:t>
             </a:r>
           </a:p>
         </p:txBody>
@@ -3620,8 +3671,8 @@
         </p:nvSpPr>
         <p:spPr>
           <a:xfrm>
-            <a:off x="0" y="1476000"/>
-            <a:ext cx="3240000" cy="324000"/>
+            <a:off x="252000" y="352800"/>
+            <a:ext cx="108000" cy="14400"/>
           </a:xfrm>
           <a:prstGeom prst="rect">
             <a:avLst/>
@@ -3641,16 +3692,37 @@
           </a:p>
         </p:txBody>
       </p:sp>
-      <p:sp>
-        <p:nvSpPr>
-          <p:cNvPr id="4" name="텍스트"/>
+      <p:cxnSp>
+        <p:nvCxnSpPr>
+          <p:cNvPr id="4" name="Connector 3"/>
+          <p:cNvCxnSpPr/>
+          <p:nvPr/>
+        </p:nvCxnSpPr>
+        <p:spPr>
+          <a:xfrm>
+            <a:off x="252000" y="468000"/>
+            <a:ext cx="1512000" cy="0"/>
+          </a:xfrm>
+          <a:prstGeom prst="line">
+            <a:avLst/>
+          </a:prstGeom>
+          <a:ln w="3600">
+            <a:solidFill>
+              <a:srgbClr val="E6F7C4"/>
+            </a:solidFill>
+          </a:ln>
+        </p:spPr>
+      </p:cxnSp>
+      <p:sp>
+        <p:nvSpPr>
+          <p:cNvPr id="5" name="텍스트"/>
           <p:cNvSpPr txBox="1"/>
           <p:nvPr/>
         </p:nvSpPr>
         <p:spPr>
           <a:xfrm>
-            <a:off x="252000" y="1569600"/>
-            <a:ext cx="1872000" cy="142876"/>
+            <a:off x="252000" y="511200"/>
+            <a:ext cx="1260000" cy="133351"/>
           </a:xfrm>
           <a:prstGeom prst="rect">
             <a:avLst/>
@@ -3665,41 +3737,246 @@
           <a:p>
             <a:pPr algn="l">
               <a:lnSpc>
-                <a:spcPts val="1087"/>
+                <a:spcPts val="1015"/>
               </a:lnSpc>
             </a:pPr>
             <a:r>
-              <a:rPr sz="750" b="1" spc="200">
+              <a:rPr sz="700" b="0">
                 <a:solidFill>
                   <a:srgbClr val="12151C"/>
                 </a:solidFill>
                 <a:latin typeface="맑은 고딕"/>
                 <a:ea typeface="맑은 고딕"/>
               </a:rPr>
-              <a:t>학교 · 학원 이름</a:t>
-            </a:r>
-          </a:p>
-        </p:txBody>
-      </p:sp>
-      <p:sp>
-        <p:nvSpPr>
-          <p:cNvPr id="5" name="Oval 4"/>
+              <a:t>논술</a:t>
+            </a:r>
+          </a:p>
+        </p:txBody>
+      </p:sp>
+      <p:cxnSp>
+        <p:nvCxnSpPr>
+          <p:cNvPr id="6" name="Connector 5"/>
+          <p:cNvCxnSpPr/>
+          <p:nvPr/>
+        </p:nvCxnSpPr>
+        <p:spPr>
+          <a:xfrm>
+            <a:off x="252000" y="655200"/>
+            <a:ext cx="1512000" cy="0"/>
+          </a:xfrm>
+          <a:prstGeom prst="line">
+            <a:avLst/>
+          </a:prstGeom>
+          <a:ln w="3600">
+            <a:solidFill>
+              <a:srgbClr val="E6F7C4"/>
+            </a:solidFill>
+          </a:ln>
+        </p:spPr>
+      </p:cxnSp>
+      <p:sp>
+        <p:nvSpPr>
+          <p:cNvPr id="7" name="텍스트"/>
+          <p:cNvSpPr txBox="1"/>
+          <p:nvPr/>
+        </p:nvSpPr>
+        <p:spPr>
+          <a:xfrm>
+            <a:off x="252000" y="698400"/>
+            <a:ext cx="1260000" cy="133351"/>
+          </a:xfrm>
+          <a:prstGeom prst="rect">
+            <a:avLst/>
+          </a:prstGeom>
+          <a:noFill/>
+        </p:spPr>
+        <p:txBody>
+          <a:bodyPr wrap="square" lIns="0" rIns="0" tIns="0" bIns="0" anchor="t">
+            <a:spAutoFit/>
+          </a:bodyPr>
+          <a:lstStyle/>
+          <a:p>
+            <a:pPr algn="l">
+              <a:lnSpc>
+                <a:spcPts val="1015"/>
+              </a:lnSpc>
+            </a:pPr>
+            <a:r>
+              <a:rPr sz="700" b="0">
+                <a:solidFill>
+                  <a:srgbClr val="12151C"/>
+                </a:solidFill>
+                <a:latin typeface="맑은 고딕"/>
+                <a:ea typeface="맑은 고딕"/>
+              </a:rPr>
+              <a:t>진로 상담</a:t>
+            </a:r>
+          </a:p>
+        </p:txBody>
+      </p:sp>
+      <p:cxnSp>
+        <p:nvCxnSpPr>
+          <p:cNvPr id="8" name="Connector 7"/>
+          <p:cNvCxnSpPr/>
+          <p:nvPr/>
+        </p:nvCxnSpPr>
+        <p:spPr>
+          <a:xfrm>
+            <a:off x="252000" y="842400"/>
+            <a:ext cx="1512000" cy="0"/>
+          </a:xfrm>
+          <a:prstGeom prst="line">
+            <a:avLst/>
+          </a:prstGeom>
+          <a:ln w="3600">
+            <a:solidFill>
+              <a:srgbClr val="E6F7C4"/>
+            </a:solidFill>
+          </a:ln>
+        </p:spPr>
+      </p:cxnSp>
+      <p:sp>
+        <p:nvSpPr>
+          <p:cNvPr id="9" name="텍스트"/>
+          <p:cNvSpPr txBox="1"/>
+          <p:nvPr/>
+        </p:nvSpPr>
+        <p:spPr>
+          <a:xfrm>
+            <a:off x="252000" y="885600"/>
+            <a:ext cx="1260000" cy="133351"/>
+          </a:xfrm>
+          <a:prstGeom prst="rect">
+            <a:avLst/>
+          </a:prstGeom>
+          <a:noFill/>
+        </p:spPr>
+        <p:txBody>
+          <a:bodyPr wrap="square" lIns="0" rIns="0" tIns="0" bIns="0" anchor="t">
+            <a:spAutoFit/>
+          </a:bodyPr>
+          <a:lstStyle/>
+          <a:p>
+            <a:pPr algn="l">
+              <a:lnSpc>
+                <a:spcPts val="1015"/>
+              </a:lnSpc>
+            </a:pPr>
+            <a:r>
+              <a:rPr sz="700" b="0">
+                <a:solidFill>
+                  <a:srgbClr val="12151C"/>
+                </a:solidFill>
+                <a:latin typeface="맑은 고딕"/>
+                <a:ea typeface="맑은 고딕"/>
+              </a:rPr>
+              <a:t>방과후 수업</a:t>
+            </a:r>
+          </a:p>
+        </p:txBody>
+      </p:sp>
+      <p:cxnSp>
+        <p:nvCxnSpPr>
+          <p:cNvPr id="10" name="Connector 9"/>
+          <p:cNvCxnSpPr/>
+          <p:nvPr/>
+        </p:nvCxnSpPr>
+        <p:spPr>
+          <a:xfrm>
+            <a:off x="252000" y="1029600"/>
+            <a:ext cx="1512000" cy="0"/>
+          </a:xfrm>
+          <a:prstGeom prst="line">
+            <a:avLst/>
+          </a:prstGeom>
+          <a:ln w="3600">
+            <a:solidFill>
+              <a:srgbClr val="E6F7C4"/>
+            </a:solidFill>
+          </a:ln>
+        </p:spPr>
+      </p:cxnSp>
+      <p:sp>
+        <p:nvSpPr>
+          <p:cNvPr id="11" name="텍스트"/>
+          <p:cNvSpPr txBox="1"/>
+          <p:nvPr/>
+        </p:nvSpPr>
+        <p:spPr>
+          <a:xfrm>
+            <a:off x="252000" y="1072800"/>
+            <a:ext cx="1260000" cy="133351"/>
+          </a:xfrm>
+          <a:prstGeom prst="rect">
+            <a:avLst/>
+          </a:prstGeom>
+          <a:noFill/>
+        </p:spPr>
+        <p:txBody>
+          <a:bodyPr wrap="square" lIns="0" rIns="0" tIns="0" bIns="0" anchor="t">
+            <a:spAutoFit/>
+          </a:bodyPr>
+          <a:lstStyle/>
+          <a:p>
+            <a:pPr algn="l">
+              <a:lnSpc>
+                <a:spcPts val="1015"/>
+              </a:lnSpc>
+            </a:pPr>
+            <a:r>
+              <a:rPr sz="700" b="0">
+                <a:solidFill>
+                  <a:srgbClr val="12151C"/>
+                </a:solidFill>
+                <a:latin typeface="맑은 고딕"/>
+                <a:ea typeface="맑은 고딕"/>
+              </a:rPr>
+              <a:t>개별 지도</a:t>
+            </a:r>
+          </a:p>
+        </p:txBody>
+      </p:sp>
+      <p:cxnSp>
+        <p:nvCxnSpPr>
+          <p:cNvPr id="12" name="Connector 11"/>
+          <p:cNvCxnSpPr/>
+          <p:nvPr/>
+        </p:nvCxnSpPr>
+        <p:spPr>
+          <a:xfrm>
+            <a:off x="252000" y="1216800"/>
+            <a:ext cx="1512000" cy="0"/>
+          </a:xfrm>
+          <a:prstGeom prst="line">
+            <a:avLst/>
+          </a:prstGeom>
+          <a:ln w="3600">
+            <a:solidFill>
+              <a:srgbClr val="E6F7C4"/>
+            </a:solidFill>
+          </a:ln>
+        </p:spPr>
+      </p:cxnSp>
+      <p:sp>
+        <p:nvSpPr>
+          <p:cNvPr id="13" name="Rectangle 12"/>
           <p:cNvSpPr/>
           <p:nvPr/>
         </p:nvSpPr>
         <p:spPr>
           <a:xfrm>
-            <a:off x="2714400" y="1616400"/>
-            <a:ext cx="43200" cy="43200"/>
-          </a:xfrm>
-          <a:prstGeom prst="ellipse">
+            <a:off x="2196000" y="396000"/>
+            <a:ext cx="720000" cy="720000"/>
+          </a:xfrm>
+          <a:prstGeom prst="rect">
             <a:avLst/>
           </a:prstGeom>
-          <a:solidFill>
-            <a:srgbClr val="12151C"/>
-          </a:solidFill>
-          <a:ln>
-            <a:noFill/>
+          <a:noFill/>
+          <a:ln w="4320">
+            <a:solidFill>
+              <a:srgbClr val="4A6323"/>
+            </a:solidFill>
+            <a:prstDash val="dash"/>
           </a:ln>
         </p:spPr>
         <p:txBody>
@@ -3712,63 +3989,121 @@
       </p:sp>
       <p:sp>
         <p:nvSpPr>
-          <p:cNvPr id="6" name="Oval 5"/>
-          <p:cNvSpPr/>
+          <p:cNvPr id="14" name="텍스트"/>
+          <p:cNvSpPr txBox="1"/>
           <p:nvPr/>
         </p:nvSpPr>
         <p:spPr>
           <a:xfrm>
-            <a:off x="2822400" y="1616400"/>
-            <a:ext cx="43200" cy="43200"/>
-          </a:xfrm>
-          <a:prstGeom prst="ellipse">
+            <a:off x="2196000" y="396000"/>
+            <a:ext cx="720000" cy="720000"/>
+          </a:xfrm>
+          <a:prstGeom prst="rect">
             <a:avLst/>
           </a:prstGeom>
-          <a:solidFill>
-            <a:srgbClr val="12151C">
-              <a:alpha val="50000"/>
-            </a:srgbClr>
-          </a:solidFill>
-          <a:ln>
-            <a:noFill/>
-          </a:ln>
-        </p:spPr>
-        <p:txBody>
-          <a:bodyPr rtlCol="0" anchor="ctr"/>
-          <a:lstStyle/>
-          <a:p>
-            <a:pPr algn="ctr"/>
-          </a:p>
-        </p:txBody>
-      </p:sp>
-      <p:sp>
-        <p:nvSpPr>
-          <p:cNvPr id="7" name="Oval 6"/>
-          <p:cNvSpPr/>
+          <a:noFill/>
+        </p:spPr>
+        <p:txBody>
+          <a:bodyPr wrap="square" lIns="0" rIns="0" tIns="0" bIns="0" anchor="ctr">
+            <a:spAutoFit/>
+          </a:bodyPr>
+          <a:lstStyle/>
+          <a:p>
+            <a:pPr algn="ctr">
+              <a:lnSpc>
+                <a:spcPts val="1305"/>
+              </a:lnSpc>
+            </a:pPr>
+            <a:r>
+              <a:rPr sz="900" b="1">
+                <a:solidFill>
+                  <a:srgbClr val="4A6323"/>
+                </a:solidFill>
+                <a:latin typeface="맑은 고딕"/>
+                <a:ea typeface="맑은 고딕"/>
+              </a:rPr>
+              <a:t>QR</a:t>
+            </a:r>
+          </a:p>
+        </p:txBody>
+      </p:sp>
+      <p:sp>
+        <p:nvSpPr>
+          <p:cNvPr id="15" name="텍스트"/>
+          <p:cNvSpPr txBox="1"/>
           <p:nvPr/>
         </p:nvSpPr>
         <p:spPr>
           <a:xfrm>
-            <a:off x="2930400" y="1616400"/>
-            <a:ext cx="43200" cy="43200"/>
-          </a:xfrm>
-          <a:prstGeom prst="ellipse">
+            <a:off x="2196000" y="1209600"/>
+            <a:ext cx="720000" cy="118111"/>
+          </a:xfrm>
+          <a:prstGeom prst="rect">
             <a:avLst/>
           </a:prstGeom>
-          <a:solidFill>
-            <a:srgbClr val="12151C">
-              <a:alpha val="50000"/>
-            </a:srgbClr>
-          </a:solidFill>
-          <a:ln>
-            <a:noFill/>
-          </a:ln>
-        </p:spPr>
-        <p:txBody>
-          <a:bodyPr rtlCol="0" anchor="ctr"/>
-          <a:lstStyle/>
-          <a:p>
-            <a:pPr algn="ctr"/>
+          <a:noFill/>
+        </p:spPr>
+        <p:txBody>
+          <a:bodyPr wrap="square" lIns="0" rIns="0" tIns="0" bIns="0" anchor="t">
+            <a:spAutoFit/>
+          </a:bodyPr>
+          <a:lstStyle/>
+          <a:p>
+            <a:pPr algn="ctr">
+              <a:lnSpc>
+                <a:spcPts val="899"/>
+              </a:lnSpc>
+            </a:pPr>
+            <a:r>
+              <a:rPr sz="620" b="0">
+                <a:solidFill>
+                  <a:srgbClr val="12151C"/>
+                </a:solidFill>
+                <a:latin typeface="맑은 고딕"/>
+                <a:ea typeface="맑은 고딕"/>
+              </a:rPr>
+              <a:t>@채널아이디</a:t>
+            </a:r>
+          </a:p>
+        </p:txBody>
+      </p:sp>
+      <p:sp>
+        <p:nvSpPr>
+          <p:cNvPr id="16" name="텍스트"/>
+          <p:cNvSpPr txBox="1"/>
+          <p:nvPr/>
+        </p:nvSpPr>
+        <p:spPr>
+          <a:xfrm>
+            <a:off x="2196000" y="1353600"/>
+            <a:ext cx="720000" cy="118111"/>
+          </a:xfrm>
+          <a:prstGeom prst="rect">
+            <a:avLst/>
+          </a:prstGeom>
+          <a:noFill/>
+        </p:spPr>
+        <p:txBody>
+          <a:bodyPr wrap="square" lIns="0" rIns="0" tIns="0" bIns="0" anchor="t">
+            <a:spAutoFit/>
+          </a:bodyPr>
+          <a:lstStyle/>
+          <a:p>
+            <a:pPr algn="ctr">
+              <a:lnSpc>
+                <a:spcPts val="899"/>
+              </a:lnSpc>
+            </a:pPr>
+            <a:r>
+              <a:rPr sz="620" b="0">
+                <a:solidFill>
+                  <a:srgbClr val="4A6323"/>
+                </a:solidFill>
+                <a:latin typeface="맑은 고딕"/>
+                <a:ea typeface="맑은 고딕"/>
+              </a:rPr>
+              <a:t>평일 13:00 – 21:00</a:t>
+            </a:r>
           </a:p>
         </p:txBody>
       </p:sp>
